--- a/day2-deck/decks/Fixed Ops Gross Movers - Review.pptx
+++ b/day2-deck/decks/Fixed Ops Gross Movers - Review.pptx
@@ -1202,7 +1202,27 @@
       </p:sp>
       <p:sp>
         <p:nvSpPr>
-          <p:cNvPr id="10" name="Text 8"/>
+          <p:cNvPr id="10" name="Shape 8"/>
+          <p:cNvSpPr/>
+          <p:nvPr/>
+        </p:nvSpPr>
+        <p:spPr>
+          <a:xfrm>
+            <a:off x="4084320" y="2139696"/>
+            <a:ext cx="64008" cy="682142"/>
+          </a:xfrm>
+          <a:prstGeom prst="rect">
+            <a:avLst/>
+          </a:prstGeom>
+          <a:solidFill>
+            <a:srgbClr val="12A566"/>
+          </a:solidFill>
+          <a:ln/>
+        </p:spPr>
+      </p:sp>
+      <p:sp>
+        <p:nvSpPr>
+          <p:cNvPr id="11" name="Text 9"/>
           <p:cNvSpPr txBox="1"/>
           <p:nvPr/>
         </p:nvSpPr>
@@ -1241,14 +1261,14 @@
       </p:sp>
       <p:sp>
         <p:nvSpPr>
-          <p:cNvPr id="11" name="Text 9"/>
+          <p:cNvPr id="12" name="Text 10"/>
           <p:cNvSpPr txBox="1"/>
           <p:nvPr/>
         </p:nvSpPr>
         <p:spPr>
           <a:xfrm>
             <a:off x="1097280" y="2103120"/>
-            <a:ext cx="2026920" cy="755294"/>
+            <a:ext cx="1825752" cy="755294"/>
           </a:xfrm>
           <a:prstGeom prst="rect">
             <a:avLst/>
@@ -1320,14 +1340,14 @@
       </p:sp>
       <p:sp>
         <p:nvSpPr>
-          <p:cNvPr id="12" name="Text 10"/>
-          <p:cNvSpPr txBox="1"/>
-          <p:nvPr/>
-        </p:nvSpPr>
-        <p:spPr>
-          <a:xfrm>
-            <a:off x="3124200" y="2103120"/>
-            <a:ext cx="932688" cy="755294"/>
+          <p:cNvPr id="13" name="Text 11"/>
+          <p:cNvSpPr txBox="1"/>
+          <p:nvPr/>
+        </p:nvSpPr>
+        <p:spPr>
+          <a:xfrm>
+            <a:off x="2941320" y="2103120"/>
+            <a:ext cx="1115568" cy="755294"/>
           </a:xfrm>
           <a:prstGeom prst="rect">
             <a:avLst/>
@@ -1359,7 +1379,7 @@
       </p:sp>
       <p:sp>
         <p:nvSpPr>
-          <p:cNvPr id="13" name="Text 11"/>
+          <p:cNvPr id="14" name="Text 12"/>
           <p:cNvSpPr txBox="1"/>
           <p:nvPr/>
         </p:nvSpPr>
@@ -1398,14 +1418,14 @@
       </p:sp>
       <p:sp>
         <p:nvSpPr>
-          <p:cNvPr id="14" name="Text 12"/>
+          <p:cNvPr id="15" name="Text 13"/>
           <p:cNvSpPr txBox="1"/>
           <p:nvPr/>
         </p:nvSpPr>
         <p:spPr>
           <a:xfrm>
             <a:off x="1097280" y="2858414"/>
-            <a:ext cx="2026920" cy="755294"/>
+            <a:ext cx="1825752" cy="755294"/>
           </a:xfrm>
           <a:prstGeom prst="rect">
             <a:avLst/>
@@ -1477,14 +1497,14 @@
       </p:sp>
       <p:sp>
         <p:nvSpPr>
-          <p:cNvPr id="15" name="Text 13"/>
-          <p:cNvSpPr txBox="1"/>
-          <p:nvPr/>
-        </p:nvSpPr>
-        <p:spPr>
-          <a:xfrm>
-            <a:off x="3124200" y="2858414"/>
-            <a:ext cx="932688" cy="755294"/>
+          <p:cNvPr id="16" name="Text 14"/>
+          <p:cNvSpPr txBox="1"/>
+          <p:nvPr/>
+        </p:nvSpPr>
+        <p:spPr>
+          <a:xfrm>
+            <a:off x="2941320" y="2858414"/>
+            <a:ext cx="1115568" cy="755294"/>
           </a:xfrm>
           <a:prstGeom prst="rect">
             <a:avLst/>
@@ -1516,7 +1536,7 @@
       </p:sp>
       <p:sp>
         <p:nvSpPr>
-          <p:cNvPr id="16" name="Shape 14"/>
+          <p:cNvPr id="17" name="Shape 15"/>
           <p:cNvSpPr/>
           <p:nvPr/>
         </p:nvSpPr>
@@ -1536,7 +1556,7 @@
       </p:sp>
       <p:sp>
         <p:nvSpPr>
-          <p:cNvPr id="17" name="Text 15"/>
+          <p:cNvPr id="18" name="Text 16"/>
           <p:cNvSpPr txBox="1"/>
           <p:nvPr/>
         </p:nvSpPr>
@@ -1575,14 +1595,14 @@
       </p:sp>
       <p:sp>
         <p:nvSpPr>
-          <p:cNvPr id="18" name="Text 16"/>
+          <p:cNvPr id="19" name="Text 17"/>
           <p:cNvSpPr txBox="1"/>
           <p:nvPr/>
         </p:nvSpPr>
         <p:spPr>
           <a:xfrm>
             <a:off x="1097280" y="3613709"/>
-            <a:ext cx="2026920" cy="755294"/>
+            <a:ext cx="1825752" cy="755294"/>
           </a:xfrm>
           <a:prstGeom prst="rect">
             <a:avLst/>
@@ -1654,14 +1674,14 @@
       </p:sp>
       <p:sp>
         <p:nvSpPr>
-          <p:cNvPr id="19" name="Text 17"/>
-          <p:cNvSpPr txBox="1"/>
-          <p:nvPr/>
-        </p:nvSpPr>
-        <p:spPr>
-          <a:xfrm>
-            <a:off x="3124200" y="3613709"/>
-            <a:ext cx="932688" cy="755294"/>
+          <p:cNvPr id="20" name="Text 18"/>
+          <p:cNvSpPr txBox="1"/>
+          <p:nvPr/>
+        </p:nvSpPr>
+        <p:spPr>
+          <a:xfrm>
+            <a:off x="2941320" y="3613709"/>
+            <a:ext cx="1115568" cy="755294"/>
           </a:xfrm>
           <a:prstGeom prst="rect">
             <a:avLst/>
@@ -1693,7 +1713,7 @@
       </p:sp>
       <p:sp>
         <p:nvSpPr>
-          <p:cNvPr id="20" name="Text 18"/>
+          <p:cNvPr id="21" name="Text 19"/>
           <p:cNvSpPr txBox="1"/>
           <p:nvPr/>
         </p:nvSpPr>
@@ -1732,14 +1752,14 @@
       </p:sp>
       <p:sp>
         <p:nvSpPr>
-          <p:cNvPr id="21" name="Text 19"/>
+          <p:cNvPr id="22" name="Text 20"/>
           <p:cNvSpPr txBox="1"/>
           <p:nvPr/>
         </p:nvSpPr>
         <p:spPr>
           <a:xfrm>
             <a:off x="1097280" y="4369003"/>
-            <a:ext cx="2026920" cy="755294"/>
+            <a:ext cx="1825752" cy="755294"/>
           </a:xfrm>
           <a:prstGeom prst="rect">
             <a:avLst/>
@@ -1811,14 +1831,14 @@
       </p:sp>
       <p:sp>
         <p:nvSpPr>
-          <p:cNvPr id="22" name="Text 20"/>
-          <p:cNvSpPr txBox="1"/>
-          <p:nvPr/>
-        </p:nvSpPr>
-        <p:spPr>
-          <a:xfrm>
-            <a:off x="3124200" y="4369003"/>
-            <a:ext cx="932688" cy="755294"/>
+          <p:cNvPr id="23" name="Text 21"/>
+          <p:cNvSpPr txBox="1"/>
+          <p:nvPr/>
+        </p:nvSpPr>
+        <p:spPr>
+          <a:xfrm>
+            <a:off x="2941320" y="4369003"/>
+            <a:ext cx="1115568" cy="755294"/>
           </a:xfrm>
           <a:prstGeom prst="rect">
             <a:avLst/>
@@ -1850,7 +1870,7 @@
       </p:sp>
       <p:sp>
         <p:nvSpPr>
-          <p:cNvPr id="23" name="Shape 21"/>
+          <p:cNvPr id="24" name="Shape 22"/>
           <p:cNvSpPr/>
           <p:nvPr/>
         </p:nvSpPr>
@@ -1870,7 +1890,7 @@
       </p:sp>
       <p:sp>
         <p:nvSpPr>
-          <p:cNvPr id="24" name="Text 22"/>
+          <p:cNvPr id="25" name="Text 23"/>
           <p:cNvSpPr txBox="1"/>
           <p:nvPr/>
         </p:nvSpPr>
@@ -1909,14 +1929,14 @@
       </p:sp>
       <p:sp>
         <p:nvSpPr>
-          <p:cNvPr id="25" name="Text 23"/>
+          <p:cNvPr id="26" name="Text 24"/>
           <p:cNvSpPr txBox="1"/>
           <p:nvPr/>
         </p:nvSpPr>
         <p:spPr>
           <a:xfrm>
             <a:off x="1097280" y="5124298"/>
-            <a:ext cx="2026920" cy="755294"/>
+            <a:ext cx="1825752" cy="755294"/>
           </a:xfrm>
           <a:prstGeom prst="rect">
             <a:avLst/>
@@ -1988,14 +2008,14 @@
       </p:sp>
       <p:sp>
         <p:nvSpPr>
-          <p:cNvPr id="26" name="Text 24"/>
-          <p:cNvSpPr txBox="1"/>
-          <p:nvPr/>
-        </p:nvSpPr>
-        <p:spPr>
-          <a:xfrm>
-            <a:off x="3124200" y="5124298"/>
-            <a:ext cx="932688" cy="755294"/>
+          <p:cNvPr id="27" name="Text 25"/>
+          <p:cNvSpPr txBox="1"/>
+          <p:nvPr/>
+        </p:nvSpPr>
+        <p:spPr>
+          <a:xfrm>
+            <a:off x="2941320" y="5124298"/>
+            <a:ext cx="1115568" cy="755294"/>
           </a:xfrm>
           <a:prstGeom prst="rect">
             <a:avLst/>
@@ -2027,7 +2047,7 @@
       </p:sp>
       <p:sp>
         <p:nvSpPr>
-          <p:cNvPr id="27" name="Shape 25"/>
+          <p:cNvPr id="28" name="Shape 26"/>
           <p:cNvSpPr/>
           <p:nvPr/>
         </p:nvSpPr>
@@ -2047,7 +2067,7 @@
       </p:sp>
       <p:sp>
         <p:nvSpPr>
-          <p:cNvPr id="28" name="Text 26"/>
+          <p:cNvPr id="29" name="Text 27"/>
           <p:cNvSpPr txBox="1"/>
           <p:nvPr/>
         </p:nvSpPr>
@@ -2086,7 +2106,7 @@
       </p:sp>
       <p:sp>
         <p:nvSpPr>
-          <p:cNvPr id="29" name="Text 27"/>
+          <p:cNvPr id="30" name="Text 28"/>
           <p:cNvSpPr txBox="1"/>
           <p:nvPr/>
         </p:nvSpPr>
@@ -2125,7 +2145,7 @@
       </p:sp>
       <p:sp>
         <p:nvSpPr>
-          <p:cNvPr id="30" name="Shape 28"/>
+          <p:cNvPr id="31" name="Shape 29"/>
           <p:cNvSpPr/>
           <p:nvPr/>
         </p:nvSpPr>
@@ -2145,7 +2165,7 @@
       </p:sp>
       <p:sp>
         <p:nvSpPr>
-          <p:cNvPr id="31" name="Text 29"/>
+          <p:cNvPr id="32" name="Text 30"/>
           <p:cNvSpPr txBox="1"/>
           <p:nvPr/>
         </p:nvSpPr>
@@ -2184,14 +2204,14 @@
       </p:sp>
       <p:sp>
         <p:nvSpPr>
-          <p:cNvPr id="32" name="Text 30"/>
+          <p:cNvPr id="33" name="Text 31"/>
           <p:cNvSpPr txBox="1"/>
           <p:nvPr/>
         </p:nvSpPr>
         <p:spPr>
           <a:xfrm>
             <a:off x="4788408" y="2103120"/>
-            <a:ext cx="2026920" cy="755294"/>
+            <a:ext cx="1825752" cy="755294"/>
           </a:xfrm>
           <a:prstGeom prst="rect">
             <a:avLst/>
@@ -2263,14 +2283,14 @@
       </p:sp>
       <p:sp>
         <p:nvSpPr>
-          <p:cNvPr id="33" name="Text 31"/>
-          <p:cNvSpPr txBox="1"/>
-          <p:nvPr/>
-        </p:nvSpPr>
-        <p:spPr>
-          <a:xfrm>
-            <a:off x="6815328" y="2103120"/>
-            <a:ext cx="932688" cy="755294"/>
+          <p:cNvPr id="34" name="Text 32"/>
+          <p:cNvSpPr txBox="1"/>
+          <p:nvPr/>
+        </p:nvSpPr>
+        <p:spPr>
+          <a:xfrm>
+            <a:off x="6632448" y="2103120"/>
+            <a:ext cx="1115568" cy="755294"/>
           </a:xfrm>
           <a:prstGeom prst="rect">
             <a:avLst/>
@@ -2302,7 +2322,7 @@
       </p:sp>
       <p:sp>
         <p:nvSpPr>
-          <p:cNvPr id="34" name="Text 32"/>
+          <p:cNvPr id="35" name="Text 33"/>
           <p:cNvSpPr txBox="1"/>
           <p:nvPr/>
         </p:nvSpPr>
@@ -2341,14 +2361,14 @@
       </p:sp>
       <p:sp>
         <p:nvSpPr>
-          <p:cNvPr id="35" name="Text 33"/>
+          <p:cNvPr id="36" name="Text 34"/>
           <p:cNvSpPr txBox="1"/>
           <p:nvPr/>
         </p:nvSpPr>
         <p:spPr>
           <a:xfrm>
             <a:off x="4788408" y="2858414"/>
-            <a:ext cx="2026920" cy="755294"/>
+            <a:ext cx="1825752" cy="755294"/>
           </a:xfrm>
           <a:prstGeom prst="rect">
             <a:avLst/>
@@ -2420,14 +2440,14 @@
       </p:sp>
       <p:sp>
         <p:nvSpPr>
-          <p:cNvPr id="36" name="Text 34"/>
-          <p:cNvSpPr txBox="1"/>
-          <p:nvPr/>
-        </p:nvSpPr>
-        <p:spPr>
-          <a:xfrm>
-            <a:off x="6815328" y="2858414"/>
-            <a:ext cx="932688" cy="755294"/>
+          <p:cNvPr id="37" name="Text 35"/>
+          <p:cNvSpPr txBox="1"/>
+          <p:nvPr/>
+        </p:nvSpPr>
+        <p:spPr>
+          <a:xfrm>
+            <a:off x="6632448" y="2858414"/>
+            <a:ext cx="1115568" cy="755294"/>
           </a:xfrm>
           <a:prstGeom prst="rect">
             <a:avLst/>
@@ -2459,7 +2479,7 @@
       </p:sp>
       <p:sp>
         <p:nvSpPr>
-          <p:cNvPr id="37" name="Shape 35"/>
+          <p:cNvPr id="38" name="Shape 36"/>
           <p:cNvSpPr/>
           <p:nvPr/>
         </p:nvSpPr>
@@ -2479,7 +2499,7 @@
       </p:sp>
       <p:sp>
         <p:nvSpPr>
-          <p:cNvPr id="38" name="Text 36"/>
+          <p:cNvPr id="39" name="Text 37"/>
           <p:cNvSpPr txBox="1"/>
           <p:nvPr/>
         </p:nvSpPr>
@@ -2518,14 +2538,14 @@
       </p:sp>
       <p:sp>
         <p:nvSpPr>
-          <p:cNvPr id="39" name="Text 37"/>
+          <p:cNvPr id="40" name="Text 38"/>
           <p:cNvSpPr txBox="1"/>
           <p:nvPr/>
         </p:nvSpPr>
         <p:spPr>
           <a:xfrm>
             <a:off x="4788408" y="3613709"/>
-            <a:ext cx="2026920" cy="755294"/>
+            <a:ext cx="1825752" cy="755294"/>
           </a:xfrm>
           <a:prstGeom prst="rect">
             <a:avLst/>
@@ -2597,14 +2617,14 @@
       </p:sp>
       <p:sp>
         <p:nvSpPr>
-          <p:cNvPr id="40" name="Text 38"/>
-          <p:cNvSpPr txBox="1"/>
-          <p:nvPr/>
-        </p:nvSpPr>
-        <p:spPr>
-          <a:xfrm>
-            <a:off x="6815328" y="3613709"/>
-            <a:ext cx="932688" cy="755294"/>
+          <p:cNvPr id="41" name="Text 39"/>
+          <p:cNvSpPr txBox="1"/>
+          <p:nvPr/>
+        </p:nvSpPr>
+        <p:spPr>
+          <a:xfrm>
+            <a:off x="6632448" y="3613709"/>
+            <a:ext cx="1115568" cy="755294"/>
           </a:xfrm>
           <a:prstGeom prst="rect">
             <a:avLst/>
@@ -2636,7 +2656,7 @@
       </p:sp>
       <p:sp>
         <p:nvSpPr>
-          <p:cNvPr id="41" name="Text 39"/>
+          <p:cNvPr id="42" name="Text 40"/>
           <p:cNvSpPr txBox="1"/>
           <p:nvPr/>
         </p:nvSpPr>
@@ -2675,14 +2695,14 @@
       </p:sp>
       <p:sp>
         <p:nvSpPr>
-          <p:cNvPr id="42" name="Text 40"/>
+          <p:cNvPr id="43" name="Text 41"/>
           <p:cNvSpPr txBox="1"/>
           <p:nvPr/>
         </p:nvSpPr>
         <p:spPr>
           <a:xfrm>
             <a:off x="4788408" y="4369003"/>
-            <a:ext cx="2026920" cy="755294"/>
+            <a:ext cx="1825752" cy="755294"/>
           </a:xfrm>
           <a:prstGeom prst="rect">
             <a:avLst/>
@@ -2754,14 +2774,14 @@
       </p:sp>
       <p:sp>
         <p:nvSpPr>
-          <p:cNvPr id="43" name="Text 41"/>
-          <p:cNvSpPr txBox="1"/>
-          <p:nvPr/>
-        </p:nvSpPr>
-        <p:spPr>
-          <a:xfrm>
-            <a:off x="6815328" y="4369003"/>
-            <a:ext cx="932688" cy="755294"/>
+          <p:cNvPr id="44" name="Text 42"/>
+          <p:cNvSpPr txBox="1"/>
+          <p:nvPr/>
+        </p:nvSpPr>
+        <p:spPr>
+          <a:xfrm>
+            <a:off x="6632448" y="4369003"/>
+            <a:ext cx="1115568" cy="755294"/>
           </a:xfrm>
           <a:prstGeom prst="rect">
             <a:avLst/>
@@ -2793,7 +2813,7 @@
       </p:sp>
       <p:sp>
         <p:nvSpPr>
-          <p:cNvPr id="44" name="Shape 42"/>
+          <p:cNvPr id="45" name="Shape 43"/>
           <p:cNvSpPr/>
           <p:nvPr/>
         </p:nvSpPr>
@@ -2813,7 +2833,7 @@
       </p:sp>
       <p:sp>
         <p:nvSpPr>
-          <p:cNvPr id="45" name="Text 43"/>
+          <p:cNvPr id="46" name="Text 44"/>
           <p:cNvSpPr txBox="1"/>
           <p:nvPr/>
         </p:nvSpPr>
@@ -2852,14 +2872,14 @@
       </p:sp>
       <p:sp>
         <p:nvSpPr>
-          <p:cNvPr id="46" name="Text 44"/>
+          <p:cNvPr id="47" name="Text 45"/>
           <p:cNvSpPr txBox="1"/>
           <p:nvPr/>
         </p:nvSpPr>
         <p:spPr>
           <a:xfrm>
             <a:off x="4788408" y="5124298"/>
-            <a:ext cx="2026920" cy="755294"/>
+            <a:ext cx="1825752" cy="755294"/>
           </a:xfrm>
           <a:prstGeom prst="rect">
             <a:avLst/>
@@ -2931,14 +2951,14 @@
       </p:sp>
       <p:sp>
         <p:nvSpPr>
-          <p:cNvPr id="47" name="Text 45"/>
-          <p:cNvSpPr txBox="1"/>
-          <p:nvPr/>
-        </p:nvSpPr>
-        <p:spPr>
-          <a:xfrm>
-            <a:off x="6815328" y="5124298"/>
-            <a:ext cx="932688" cy="755294"/>
+          <p:cNvPr id="48" name="Text 46"/>
+          <p:cNvSpPr txBox="1"/>
+          <p:nvPr/>
+        </p:nvSpPr>
+        <p:spPr>
+          <a:xfrm>
+            <a:off x="6632448" y="5124298"/>
+            <a:ext cx="1115568" cy="755294"/>
           </a:xfrm>
           <a:prstGeom prst="rect">
             <a:avLst/>
@@ -2970,7 +2990,7 @@
       </p:sp>
       <p:sp>
         <p:nvSpPr>
-          <p:cNvPr id="48" name="Shape 46"/>
+          <p:cNvPr id="49" name="Shape 47"/>
           <p:cNvSpPr/>
           <p:nvPr/>
         </p:nvSpPr>
@@ -2990,7 +3010,7 @@
       </p:sp>
       <p:sp>
         <p:nvSpPr>
-          <p:cNvPr id="49" name="Text 47"/>
+          <p:cNvPr id="50" name="Text 48"/>
           <p:cNvSpPr txBox="1"/>
           <p:nvPr/>
         </p:nvSpPr>
@@ -3029,7 +3049,7 @@
       </p:sp>
       <p:sp>
         <p:nvSpPr>
-          <p:cNvPr id="50" name="Text 48"/>
+          <p:cNvPr id="51" name="Text 49"/>
           <p:cNvSpPr txBox="1"/>
           <p:nvPr/>
         </p:nvSpPr>
@@ -3068,7 +3088,7 @@
       </p:sp>
       <p:sp>
         <p:nvSpPr>
-          <p:cNvPr id="51" name="Shape 49"/>
+          <p:cNvPr id="52" name="Shape 50"/>
           <p:cNvSpPr/>
           <p:nvPr/>
         </p:nvSpPr>
@@ -3088,7 +3108,7 @@
       </p:sp>
       <p:sp>
         <p:nvSpPr>
-          <p:cNvPr id="52" name="Text 50"/>
+          <p:cNvPr id="53" name="Text 51"/>
           <p:cNvSpPr txBox="1"/>
           <p:nvPr/>
         </p:nvSpPr>
@@ -3127,14 +3147,14 @@
       </p:sp>
       <p:sp>
         <p:nvSpPr>
-          <p:cNvPr id="53" name="Text 51"/>
+          <p:cNvPr id="54" name="Text 52"/>
           <p:cNvSpPr txBox="1"/>
           <p:nvPr/>
         </p:nvSpPr>
         <p:spPr>
           <a:xfrm>
             <a:off x="8479536" y="2103120"/>
-            <a:ext cx="2026920" cy="755294"/>
+            <a:ext cx="1825752" cy="755294"/>
           </a:xfrm>
           <a:prstGeom prst="rect">
             <a:avLst/>
@@ -3206,14 +3226,14 @@
       </p:sp>
       <p:sp>
         <p:nvSpPr>
-          <p:cNvPr id="54" name="Text 52"/>
-          <p:cNvSpPr txBox="1"/>
-          <p:nvPr/>
-        </p:nvSpPr>
-        <p:spPr>
-          <a:xfrm>
-            <a:off x="10506456" y="2103120"/>
-            <a:ext cx="932688" cy="755294"/>
+          <p:cNvPr id="55" name="Text 53"/>
+          <p:cNvSpPr txBox="1"/>
+          <p:nvPr/>
+        </p:nvSpPr>
+        <p:spPr>
+          <a:xfrm>
+            <a:off x="10323576" y="2103120"/>
+            <a:ext cx="1115568" cy="755294"/>
           </a:xfrm>
           <a:prstGeom prst="rect">
             <a:avLst/>
@@ -3245,7 +3265,7 @@
       </p:sp>
       <p:sp>
         <p:nvSpPr>
-          <p:cNvPr id="55" name="Text 53"/>
+          <p:cNvPr id="56" name="Text 54"/>
           <p:cNvSpPr txBox="1"/>
           <p:nvPr/>
         </p:nvSpPr>
@@ -3284,14 +3304,14 @@
       </p:sp>
       <p:sp>
         <p:nvSpPr>
-          <p:cNvPr id="56" name="Text 54"/>
+          <p:cNvPr id="57" name="Text 55"/>
           <p:cNvSpPr txBox="1"/>
           <p:nvPr/>
         </p:nvSpPr>
         <p:spPr>
           <a:xfrm>
             <a:off x="8479536" y="2858414"/>
-            <a:ext cx="2026920" cy="755294"/>
+            <a:ext cx="1825752" cy="755294"/>
           </a:xfrm>
           <a:prstGeom prst="rect">
             <a:avLst/>
@@ -3363,14 +3383,14 @@
       </p:sp>
       <p:sp>
         <p:nvSpPr>
-          <p:cNvPr id="57" name="Text 55"/>
-          <p:cNvSpPr txBox="1"/>
-          <p:nvPr/>
-        </p:nvSpPr>
-        <p:spPr>
-          <a:xfrm>
-            <a:off x="10506456" y="2858414"/>
-            <a:ext cx="932688" cy="755294"/>
+          <p:cNvPr id="58" name="Text 56"/>
+          <p:cNvSpPr txBox="1"/>
+          <p:nvPr/>
+        </p:nvSpPr>
+        <p:spPr>
+          <a:xfrm>
+            <a:off x="10323576" y="2858414"/>
+            <a:ext cx="1115568" cy="755294"/>
           </a:xfrm>
           <a:prstGeom prst="rect">
             <a:avLst/>
@@ -3402,7 +3422,7 @@
       </p:sp>
       <p:sp>
         <p:nvSpPr>
-          <p:cNvPr id="58" name="Shape 56"/>
+          <p:cNvPr id="59" name="Shape 57"/>
           <p:cNvSpPr/>
           <p:nvPr/>
         </p:nvSpPr>
@@ -3422,7 +3442,7 @@
       </p:sp>
       <p:sp>
         <p:nvSpPr>
-          <p:cNvPr id="59" name="Text 57"/>
+          <p:cNvPr id="60" name="Text 58"/>
           <p:cNvSpPr txBox="1"/>
           <p:nvPr/>
         </p:nvSpPr>
@@ -3461,14 +3481,14 @@
       </p:sp>
       <p:sp>
         <p:nvSpPr>
-          <p:cNvPr id="60" name="Text 58"/>
+          <p:cNvPr id="61" name="Text 59"/>
           <p:cNvSpPr txBox="1"/>
           <p:nvPr/>
         </p:nvSpPr>
         <p:spPr>
           <a:xfrm>
             <a:off x="8479536" y="3613709"/>
-            <a:ext cx="2026920" cy="755294"/>
+            <a:ext cx="1825752" cy="755294"/>
           </a:xfrm>
           <a:prstGeom prst="rect">
             <a:avLst/>
@@ -3540,14 +3560,14 @@
       </p:sp>
       <p:sp>
         <p:nvSpPr>
-          <p:cNvPr id="61" name="Text 59"/>
-          <p:cNvSpPr txBox="1"/>
-          <p:nvPr/>
-        </p:nvSpPr>
-        <p:spPr>
-          <a:xfrm>
-            <a:off x="10506456" y="3613709"/>
-            <a:ext cx="932688" cy="755294"/>
+          <p:cNvPr id="62" name="Text 60"/>
+          <p:cNvSpPr txBox="1"/>
+          <p:nvPr/>
+        </p:nvSpPr>
+        <p:spPr>
+          <a:xfrm>
+            <a:off x="10323576" y="3613709"/>
+            <a:ext cx="1115568" cy="755294"/>
           </a:xfrm>
           <a:prstGeom prst="rect">
             <a:avLst/>
@@ -3579,7 +3599,7 @@
       </p:sp>
       <p:sp>
         <p:nvSpPr>
-          <p:cNvPr id="62" name="Text 60"/>
+          <p:cNvPr id="63" name="Text 61"/>
           <p:cNvSpPr txBox="1"/>
           <p:nvPr/>
         </p:nvSpPr>
@@ -3618,14 +3638,14 @@
       </p:sp>
       <p:sp>
         <p:nvSpPr>
-          <p:cNvPr id="63" name="Text 61"/>
+          <p:cNvPr id="64" name="Text 62"/>
           <p:cNvSpPr txBox="1"/>
           <p:nvPr/>
         </p:nvSpPr>
         <p:spPr>
           <a:xfrm>
             <a:off x="8479536" y="4369003"/>
-            <a:ext cx="2026920" cy="755294"/>
+            <a:ext cx="1825752" cy="755294"/>
           </a:xfrm>
           <a:prstGeom prst="rect">
             <a:avLst/>
@@ -3697,14 +3717,14 @@
       </p:sp>
       <p:sp>
         <p:nvSpPr>
-          <p:cNvPr id="64" name="Text 62"/>
-          <p:cNvSpPr txBox="1"/>
-          <p:nvPr/>
-        </p:nvSpPr>
-        <p:spPr>
-          <a:xfrm>
-            <a:off x="10506456" y="4369003"/>
-            <a:ext cx="932688" cy="755294"/>
+          <p:cNvPr id="65" name="Text 63"/>
+          <p:cNvSpPr txBox="1"/>
+          <p:nvPr/>
+        </p:nvSpPr>
+        <p:spPr>
+          <a:xfrm>
+            <a:off x="10323576" y="4369003"/>
+            <a:ext cx="1115568" cy="755294"/>
           </a:xfrm>
           <a:prstGeom prst="rect">
             <a:avLst/>
@@ -3736,7 +3756,7 @@
       </p:sp>
       <p:sp>
         <p:nvSpPr>
-          <p:cNvPr id="65" name="Shape 63"/>
+          <p:cNvPr id="66" name="Shape 64"/>
           <p:cNvSpPr/>
           <p:nvPr/>
         </p:nvSpPr>
@@ -3756,7 +3776,27 @@
       </p:sp>
       <p:sp>
         <p:nvSpPr>
-          <p:cNvPr id="66" name="Text 64"/>
+          <p:cNvPr id="67" name="Shape 65"/>
+          <p:cNvSpPr/>
+          <p:nvPr/>
+        </p:nvSpPr>
+        <p:spPr>
+          <a:xfrm>
+            <a:off x="11466576" y="5160874"/>
+            <a:ext cx="64008" cy="682142"/>
+          </a:xfrm>
+          <a:prstGeom prst="rect">
+            <a:avLst/>
+          </a:prstGeom>
+          <a:solidFill>
+            <a:srgbClr val="12A566"/>
+          </a:solidFill>
+          <a:ln/>
+        </p:spPr>
+      </p:sp>
+      <p:sp>
+        <p:nvSpPr>
+          <p:cNvPr id="68" name="Text 66"/>
           <p:cNvSpPr txBox="1"/>
           <p:nvPr/>
         </p:nvSpPr>
@@ -3795,14 +3835,14 @@
       </p:sp>
       <p:sp>
         <p:nvSpPr>
-          <p:cNvPr id="67" name="Text 65"/>
+          <p:cNvPr id="69" name="Text 67"/>
           <p:cNvSpPr txBox="1"/>
           <p:nvPr/>
         </p:nvSpPr>
         <p:spPr>
           <a:xfrm>
             <a:off x="8479536" y="5124298"/>
-            <a:ext cx="2026920" cy="755294"/>
+            <a:ext cx="1825752" cy="755294"/>
           </a:xfrm>
           <a:prstGeom prst="rect">
             <a:avLst/>
@@ -3874,14 +3914,14 @@
       </p:sp>
       <p:sp>
         <p:nvSpPr>
-          <p:cNvPr id="68" name="Text 66"/>
-          <p:cNvSpPr txBox="1"/>
-          <p:nvPr/>
-        </p:nvSpPr>
-        <p:spPr>
-          <a:xfrm>
-            <a:off x="10506456" y="5124298"/>
-            <a:ext cx="932688" cy="755294"/>
+          <p:cNvPr id="70" name="Text 68"/>
+          <p:cNvSpPr txBox="1"/>
+          <p:nvPr/>
+        </p:nvSpPr>
+        <p:spPr>
+          <a:xfrm>
+            <a:off x="10323576" y="5124298"/>
+            <a:ext cx="1115568" cy="755294"/>
           </a:xfrm>
           <a:prstGeom prst="rect">
             <a:avLst/>
@@ -3913,7 +3953,7 @@
       </p:sp>
       <p:sp>
         <p:nvSpPr>
-          <p:cNvPr id="69" name="Shape 67"/>
+          <p:cNvPr id="71" name="Shape 69"/>
           <p:cNvSpPr/>
           <p:nvPr/>
         </p:nvSpPr>
@@ -3933,7 +3973,7 @@
       </p:sp>
       <p:sp>
         <p:nvSpPr>
-          <p:cNvPr id="70" name="Text 68"/>
+          <p:cNvPr id="72" name="Text 70"/>
           <p:cNvSpPr txBox="1"/>
           <p:nvPr/>
         </p:nvSpPr>
